--- a/atelier/atelier-f04-open-studio-today.pptx
+++ b/atelier/atelier-f04-open-studio-today.pptx
@@ -4017,8 +4017,8 @@
         </p:nvSpPr>
         <p:spPr>
           <a:xfrm>
-            <a:off x="3762375" y="5854898"/>
-            <a:ext cx="3628787" cy="304800"/>
+            <a:off x="3762375" y="5914430"/>
+            <a:ext cx="3628787" cy="245269"/>
           </a:xfrm>
           <a:prstGeom prst="rect">
             <a:avLst/>
@@ -4029,7 +4029,11 @@
           <a:bodyPr wrap="none" anchor="t" lIns="0" rIns="0" tIns="0" bIns="0"/>
           <a:lstStyle/>
           <a:p>
-            <a:pPr algn="l"/>
+            <a:pPr algn="l">
+              <a:lnSpc>
+                <a:spcPct val="92000"/>
+              </a:lnSpc>
+            </a:pPr>
             <a:r>
               <a:rPr sz="2100" i="1" b="0">
                 <a:solidFill>
